--- a/pptxtest.pptx
+++ b/pptxtest.pptx
@@ -3158,7 +3158,7 @@
           <a:p>
             <a:pPr algn="ctr"/>
             <a:r>
-              <a:rPr sz="4000" b="0">
+              <a:rPr sz="2000" b="0">
                 <a:solidFill>
                   <a:srgbClr val="FFFFFF"/>
                 </a:solidFill>
@@ -3193,7 +3193,7 @@
           <a:p>
             <a:pPr algn="l"/>
             <a:r>
-              <a:rPr sz="6400" b="1">
+              <a:rPr sz="3200" b="1">
                 <a:solidFill>
                   <a:srgbClr val="1A1A1A"/>
                 </a:solidFill>
@@ -3205,7 +3205,7 @@
           <a:p>
             <a:pPr algn="l"/>
             <a:r>
-              <a:rPr sz="6400" b="1">
+              <a:rPr sz="3200" b="1">
                 <a:solidFill>
                   <a:srgbClr val="1A1A1A"/>
                 </a:solidFill>
@@ -3233,7 +3233,7 @@
           <a:solidFill>
             <a:srgbClr val="FFFFFF"/>
           </a:solidFill>
-          <a:ln w="50800">
+          <a:ln w="25400">
             <a:solidFill>
               <a:srgbClr val="555555"/>
             </a:solidFill>
@@ -3284,7 +3284,7 @@
           <a:p>
             <a:pPr algn="ctr"/>
             <a:r>
-              <a:rPr sz="3800" b="0">
+              <a:rPr sz="1900" b="0">
                 <a:solidFill>
                   <a:srgbClr val="1A1A1A"/>
                 </a:solidFill>
@@ -3312,7 +3312,7 @@
           <a:solidFill>
             <a:srgbClr val="FFFFFF"/>
           </a:solidFill>
-          <a:ln w="50800">
+          <a:ln w="25400">
             <a:solidFill>
               <a:srgbClr val="555555"/>
             </a:solidFill>
@@ -3363,7 +3363,7 @@
           <a:p>
             <a:pPr algn="ctr"/>
             <a:r>
-              <a:rPr sz="3800" b="0">
+              <a:rPr sz="1900" b="0">
                 <a:solidFill>
                   <a:srgbClr val="1A1A1A"/>
                 </a:solidFill>
@@ -3391,7 +3391,7 @@
           <a:solidFill>
             <a:srgbClr val="FFFFFF"/>
           </a:solidFill>
-          <a:ln w="50800">
+          <a:ln w="25400">
             <a:solidFill>
               <a:srgbClr val="555555"/>
             </a:solidFill>
@@ -3442,7 +3442,7 @@
           <a:p>
             <a:pPr algn="ctr"/>
             <a:r>
-              <a:rPr sz="3800" b="0">
+              <a:rPr sz="1900" b="0">
                 <a:solidFill>
                   <a:srgbClr val="1A1A1A"/>
                 </a:solidFill>
@@ -3470,7 +3470,7 @@
           <a:solidFill>
             <a:srgbClr val="FFFFFF"/>
           </a:solidFill>
-          <a:ln w="50800">
+          <a:ln w="25400">
             <a:solidFill>
               <a:srgbClr val="555555"/>
             </a:solidFill>
@@ -3521,7 +3521,7 @@
           <a:p>
             <a:pPr algn="ctr"/>
             <a:r>
-              <a:rPr sz="3800" b="0">
+              <a:rPr sz="1900" b="0">
                 <a:solidFill>
                   <a:srgbClr val="1A1A1A"/>
                 </a:solidFill>
@@ -3556,7 +3556,7 @@
           <a:p>
             <a:pPr algn="l"/>
             <a:r>
-              <a:rPr sz="2800" b="0">
+              <a:rPr sz="1400" b="0">
                 <a:solidFill>
                   <a:srgbClr val="777777"/>
                 </a:solidFill>
@@ -3697,7 +3697,7 @@
           <a:p>
             <a:pPr algn="l"/>
             <a:r>
-              <a:rPr sz="4400" b="1">
+              <a:rPr sz="2200" b="1">
                 <a:solidFill>
                   <a:srgbClr val="1A1A1A"/>
                 </a:solidFill>
@@ -3725,7 +3725,7 @@
           <a:solidFill>
             <a:srgbClr val="FAFAFA"/>
           </a:solidFill>
-          <a:ln w="63500">
+          <a:ln w="31750">
             <a:solidFill>
               <a:srgbClr val="444444"/>
             </a:solidFill>
@@ -3776,7 +3776,7 @@
           <a:p>
             <a:pPr algn="l"/>
             <a:r>
-              <a:rPr sz="3200" b="1">
+              <a:rPr sz="1600" b="1">
                 <a:solidFill>
                   <a:srgbClr val="1A1A1A"/>
                 </a:solidFill>
@@ -3788,7 +3788,7 @@
           <a:p>
             <a:pPr algn="l"/>
             <a:r>
-              <a:rPr sz="3200" b="1">
+              <a:rPr sz="1600" b="1">
                 <a:solidFill>
                   <a:srgbClr val="1A1A1A"/>
                 </a:solidFill>
@@ -3860,7 +3860,7 @@
           <a:solidFill>
             <a:srgbClr val="FFE9C7"/>
           </a:solidFill>
-          <a:ln w="63500">
+          <a:ln w="31750">
             <a:solidFill>
               <a:srgbClr val="D08000"/>
             </a:solidFill>
@@ -3911,7 +3911,7 @@
           <a:p>
             <a:pPr algn="l"/>
             <a:r>
-              <a:rPr sz="3200" b="1">
+              <a:rPr sz="1600" b="1">
                 <a:solidFill>
                   <a:srgbClr val="C25E00"/>
                 </a:solidFill>
@@ -3923,7 +3923,7 @@
           <a:p>
             <a:pPr algn="l"/>
             <a:r>
-              <a:rPr sz="3200" b="1">
+              <a:rPr sz="1600" b="1">
                 <a:solidFill>
                   <a:srgbClr val="C25E00"/>
                 </a:solidFill>
@@ -3995,7 +3995,7 @@
           <a:solidFill>
             <a:srgbClr val="EAF4FF"/>
           </a:solidFill>
-          <a:ln w="63500">
+          <a:ln w="31750">
             <a:solidFill>
               <a:srgbClr val="3A7BD5"/>
             </a:solidFill>
@@ -4046,7 +4046,7 @@
           <a:p>
             <a:pPr algn="l"/>
             <a:r>
-              <a:rPr sz="3200" b="1">
+              <a:rPr sz="1600" b="1">
                 <a:solidFill>
                   <a:srgbClr val="14385F"/>
                 </a:solidFill>
@@ -4058,7 +4058,7 @@
           <a:p>
             <a:pPr algn="l"/>
             <a:r>
-              <a:rPr sz="3200" b="1">
+              <a:rPr sz="1600" b="1">
                 <a:solidFill>
                   <a:srgbClr val="14385F"/>
                 </a:solidFill>
@@ -4093,7 +4093,7 @@
           <a:p>
             <a:pPr algn="l"/>
             <a:r>
-              <a:rPr sz="4000" b="0">
+              <a:rPr sz="2000" b="0">
                 <a:solidFill>
                   <a:srgbClr val="1A1A1A"/>
                 </a:solidFill>
@@ -4105,7 +4105,7 @@
           <a:p>
             <a:pPr algn="l"/>
             <a:r>
-              <a:rPr sz="4000" b="0">
+              <a:rPr sz="2000" b="0">
                 <a:solidFill>
                   <a:srgbClr val="1A1A1A"/>
                 </a:solidFill>
@@ -4117,7 +4117,7 @@
           <a:p>
             <a:pPr algn="l"/>
             <a:r>
-              <a:rPr sz="4000" b="0">
+              <a:rPr sz="2000" b="0">
                 <a:solidFill>
                   <a:srgbClr val="1A1A1A"/>
                 </a:solidFill>
@@ -4145,7 +4145,7 @@
           <a:solidFill>
             <a:srgbClr val="F7FAFD"/>
           </a:solidFill>
-          <a:ln w="63500">
+          <a:ln w="31750">
             <a:solidFill>
               <a:srgbClr val="1F4E79"/>
             </a:solidFill>
@@ -4196,7 +4196,7 @@
           <a:p>
             <a:pPr algn="l"/>
             <a:r>
-              <a:rPr sz="3600" b="1">
+              <a:rPr sz="1800" b="1">
                 <a:solidFill>
                   <a:srgbClr val="1F4E79"/>
                 </a:solidFill>
@@ -4337,7 +4337,7 @@
           <a:p>
             <a:pPr algn="l"/>
             <a:r>
-              <a:rPr sz="4400" b="1">
+              <a:rPr sz="2200" b="1">
                 <a:solidFill>
                   <a:srgbClr val="1A1A1A"/>
                 </a:solidFill>
@@ -4365,7 +4365,7 @@
           <a:solidFill>
             <a:srgbClr val="FAFAFA"/>
           </a:solidFill>
-          <a:ln w="76200">
+          <a:ln w="38100">
             <a:solidFill>
               <a:srgbClr val="444444"/>
             </a:solidFill>
@@ -4416,7 +4416,7 @@
           <a:p>
             <a:pPr algn="ctr"/>
             <a:r>
-              <a:rPr sz="4400" b="1">
+              <a:rPr sz="2200" b="1">
                 <a:solidFill>
                   <a:srgbClr val="1A1A1A"/>
                 </a:solidFill>
@@ -4441,7 +4441,7 @@
           <a:prstGeom prst="line">
             <a:avLst/>
           </a:prstGeom>
-          <a:ln w="63500">
+          <a:ln w="31750">
             <a:solidFill>
               <a:srgbClr val="3D3D3D"/>
             </a:solidFill>
@@ -4480,7 +4480,7 @@
           <a:solidFill>
             <a:srgbClr val="FFE9C7"/>
           </a:solidFill>
-          <a:ln w="76200">
+          <a:ln w="38100">
             <a:solidFill>
               <a:srgbClr val="D08000"/>
             </a:solidFill>
@@ -4531,7 +4531,7 @@
           <a:p>
             <a:pPr algn="ctr"/>
             <a:r>
-              <a:rPr sz="4400" b="1">
+              <a:rPr sz="2200" b="1">
                 <a:solidFill>
                   <a:srgbClr val="C25E00"/>
                 </a:solidFill>
@@ -4556,7 +4556,7 @@
           <a:prstGeom prst="line">
             <a:avLst/>
           </a:prstGeom>
-          <a:ln w="63500">
+          <a:ln w="31750">
             <a:solidFill>
               <a:srgbClr val="3D3D3D"/>
             </a:solidFill>
@@ -4595,7 +4595,7 @@
           <a:solidFill>
             <a:srgbClr val="EAF4FF"/>
           </a:solidFill>
-          <a:ln w="76200">
+          <a:ln w="38100">
             <a:solidFill>
               <a:srgbClr val="3A7BD5"/>
             </a:solidFill>
@@ -4646,7 +4646,7 @@
           <a:p>
             <a:pPr algn="ctr"/>
             <a:r>
-              <a:rPr sz="4400" b="1">
+              <a:rPr sz="2200" b="1">
                 <a:solidFill>
                   <a:srgbClr val="14385F"/>
                 </a:solidFill>
@@ -4681,7 +4681,7 @@
           <a:p>
             <a:pPr algn="l"/>
             <a:r>
-              <a:rPr sz="4000" b="0">
+              <a:rPr sz="2000" b="0">
                 <a:solidFill>
                   <a:srgbClr val="1A1A1A"/>
                 </a:solidFill>
@@ -4693,7 +4693,7 @@
           <a:p>
             <a:pPr algn="l"/>
             <a:r>
-              <a:rPr sz="4000" b="0">
+              <a:rPr sz="2000" b="0">
                 <a:solidFill>
                   <a:srgbClr val="1A1A1A"/>
                 </a:solidFill>
